--- a/MT_Primary_vs_Offtake_1Pager.pptx
+++ b/MT_Primary_vs_Offtake_1Pager.pptx
@@ -3183,7 +3183,7 @@
               </a:defRPr>
             </a:pPr>
             <a:r>
-              <a:t>MoM Data</a:t>
+              <a:t>No MoM data</a:t>
             </a:r>
           </a:p>
         </p:txBody>
@@ -3248,7 +3248,7 @@
               </a:defRPr>
             </a:pPr>
             <a:r>
-              <a:t>MoM Data</a:t>
+              <a:t>No MoM data</a:t>
             </a:r>
           </a:p>
         </p:txBody>

--- a/MT_Primary_vs_Offtake_1Pager.pptx
+++ b/MT_Primary_vs_Offtake_1Pager.pptx
@@ -3171,19 +3171,19 @@
               </a:defRPr>
             </a:pPr>
             <a:r>
-              <a:t>No data</a:t>
+              <a:t>₹36.6 Cr</a:t>
             </a:r>
           </a:p>
           <a:p>
             <a:pPr>
               <a:defRPr sz="900">
                 <a:solidFill>
-                  <a:srgbClr val="6E6E6E"/>
+                  <a:srgbClr val="288C28"/>
                 </a:solidFill>
               </a:defRPr>
             </a:pPr>
             <a:r>
-              <a:t>No MoM data</a:t>
+              <a:t>+3.2% MoM</a:t>
             </a:r>
           </a:p>
         </p:txBody>
@@ -3236,19 +3236,19 @@
               </a:defRPr>
             </a:pPr>
             <a:r>
-              <a:t>No data</a:t>
+              <a:t>₹35.4 Cr</a:t>
             </a:r>
           </a:p>
           <a:p>
             <a:pPr>
               <a:defRPr sz="900">
                 <a:solidFill>
-                  <a:srgbClr val="6E6E6E"/>
+                  <a:srgbClr val="288C28"/>
                 </a:solidFill>
               </a:defRPr>
             </a:pPr>
             <a:r>
-              <a:t>No MoM data</a:t>
+              <a:t>+3.2% MoM</a:t>
             </a:r>
           </a:p>
         </p:txBody>
@@ -3301,19 +3301,19 @@
               </a:defRPr>
             </a:pPr>
             <a:r>
-              <a:t>TBD</a:t>
+              <a:t>3.2%</a:t>
             </a:r>
           </a:p>
           <a:p>
             <a:pPr>
               <a:defRPr sz="900">
                 <a:solidFill>
-                  <a:srgbClr val="288C28"/>
+                  <a:srgbClr val="C87800"/>
                 </a:solidFill>
               </a:defRPr>
             </a:pPr>
             <a:r>
-              <a:t>Status: Green</a:t>
+              <a:t>Status: Amber</a:t>
             </a:r>
           </a:p>
         </p:txBody>
@@ -3461,7 +3461,7 @@
                         <a:defRPr sz="1000"/>
                       </a:pPr>
                       <a:r>
-                        <a:t>0.0</a:t>
+                        <a:t>6.1</a:t>
                       </a:r>
                     </a:p>
                   </a:txBody>
@@ -3476,7 +3476,7 @@
                         <a:defRPr sz="1000"/>
                       </a:pPr>
                       <a:r>
-                        <a:t>0.0</a:t>
+                        <a:t>5.9</a:t>
                       </a:r>
                     </a:p>
                   </a:txBody>
@@ -3490,12 +3490,12 @@
                       <a:pPr>
                         <a:defRPr sz="1000" b="1">
                           <a:solidFill>
-                            <a:srgbClr val="288C28"/>
+                            <a:srgbClr val="C87800"/>
                           </a:solidFill>
                         </a:defRPr>
                       </a:pPr>
                       <a:r>
-                        <a:t>Green</a:t>
+                        <a:t>Amber</a:t>
                       </a:r>
                     </a:p>
                   </a:txBody>
@@ -3527,7 +3527,7 @@
                         <a:defRPr sz="1000"/>
                       </a:pPr>
                       <a:r>
-                        <a:t>0.0</a:t>
+                        <a:t>8.7</a:t>
                       </a:r>
                     </a:p>
                   </a:txBody>
@@ -3542,7 +3542,7 @@
                         <a:defRPr sz="1000"/>
                       </a:pPr>
                       <a:r>
-                        <a:t>0.0</a:t>
+                        <a:t>8.4</a:t>
                       </a:r>
                     </a:p>
                   </a:txBody>
@@ -3556,12 +3556,12 @@
                       <a:pPr>
                         <a:defRPr sz="1000" b="1">
                           <a:solidFill>
-                            <a:srgbClr val="288C28"/>
+                            <a:srgbClr val="C87800"/>
                           </a:solidFill>
                         </a:defRPr>
                       </a:pPr>
                       <a:r>
-                        <a:t>Green</a:t>
+                        <a:t>Amber</a:t>
                       </a:r>
                     </a:p>
                   </a:txBody>
@@ -3593,7 +3593,7 @@
                         <a:defRPr sz="1000"/>
                       </a:pPr>
                       <a:r>
-                        <a:t>0.0</a:t>
+                        <a:t>5.0</a:t>
                       </a:r>
                     </a:p>
                   </a:txBody>
@@ -3608,7 +3608,7 @@
                         <a:defRPr sz="1000"/>
                       </a:pPr>
                       <a:r>
-                        <a:t>0.0</a:t>
+                        <a:t>4.8</a:t>
                       </a:r>
                     </a:p>
                   </a:txBody>
@@ -3622,12 +3622,12 @@
                       <a:pPr>
                         <a:defRPr sz="1000" b="1">
                           <a:solidFill>
-                            <a:srgbClr val="288C28"/>
+                            <a:srgbClr val="C87800"/>
                           </a:solidFill>
                         </a:defRPr>
                       </a:pPr>
                       <a:r>
-                        <a:t>Green</a:t>
+                        <a:t>Amber</a:t>
                       </a:r>
                     </a:p>
                   </a:txBody>
@@ -3659,7 +3659,7 @@
                         <a:defRPr sz="1000"/>
                       </a:pPr>
                       <a:r>
-                        <a:t>0.0</a:t>
+                        <a:t>4.2</a:t>
                       </a:r>
                     </a:p>
                   </a:txBody>
@@ -3674,7 +3674,7 @@
                         <a:defRPr sz="1000"/>
                       </a:pPr>
                       <a:r>
-                        <a:t>0.0</a:t>
+                        <a:t>4.0</a:t>
                       </a:r>
                     </a:p>
                   </a:txBody>
@@ -3688,12 +3688,12 @@
                       <a:pPr>
                         <a:defRPr sz="1000" b="1">
                           <a:solidFill>
-                            <a:srgbClr val="288C28"/>
+                            <a:srgbClr val="C87800"/>
                           </a:solidFill>
                         </a:defRPr>
                       </a:pPr>
                       <a:r>
-                        <a:t>Green</a:t>
+                        <a:t>Amber</a:t>
                       </a:r>
                     </a:p>
                   </a:txBody>
@@ -3725,7 +3725,7 @@
                         <a:defRPr sz="1000"/>
                       </a:pPr>
                       <a:r>
-                        <a:t>0.0</a:t>
+                        <a:t>10.2</a:t>
                       </a:r>
                     </a:p>
                   </a:txBody>
@@ -3740,7 +3740,7 @@
                         <a:defRPr sz="1000"/>
                       </a:pPr>
                       <a:r>
-                        <a:t>0.0</a:t>
+                        <a:t>9.8</a:t>
                       </a:r>
                     </a:p>
                   </a:txBody>
@@ -3754,12 +3754,12 @@
                       <a:pPr>
                         <a:defRPr sz="1000" b="1">
                           <a:solidFill>
-                            <a:srgbClr val="288C28"/>
+                            <a:srgbClr val="C87800"/>
                           </a:solidFill>
                         </a:defRPr>
                       </a:pPr>
                       <a:r>
-                        <a:t>Green</a:t>
+                        <a:t>Amber</a:t>
                       </a:r>
                     </a:p>
                   </a:txBody>
@@ -3791,7 +3791,7 @@
                         <a:defRPr sz="1000"/>
                       </a:pPr>
                       <a:r>
-                        <a:t>0.0</a:t>
+                        <a:t>2.5</a:t>
                       </a:r>
                     </a:p>
                   </a:txBody>
@@ -3806,7 +3806,7 @@
                         <a:defRPr sz="1000"/>
                       </a:pPr>
                       <a:r>
-                        <a:t>0.0</a:t>
+                        <a:t>2.4</a:t>
                       </a:r>
                     </a:p>
                   </a:txBody>
@@ -3820,12 +3820,12 @@
                       <a:pPr>
                         <a:defRPr sz="1000" b="1">
                           <a:solidFill>
-                            <a:srgbClr val="288C28"/>
+                            <a:srgbClr val="C87800"/>
                           </a:solidFill>
                         </a:defRPr>
                       </a:pPr>
                       <a:r>
-                        <a:t>Green</a:t>
+                        <a:t>Amber</a:t>
                       </a:r>
                     </a:p>
                   </a:txBody>
@@ -3880,7 +3880,18 @@
               <a:defRPr sz="1000"/>
             </a:pPr>
             <a:r>
-              <a:t>🟢 On Track: Alignment gap at 0.0% within target.</a:t>
+              <a:t>🟡 Alert: Alignment gap at 3.2% requires attention.</a:t>
+            </a:r>
+          </a:p>
+          <a:p>
+            <a:pPr>
+              <a:spcAft>
+                <a:spcPts val="600"/>
+              </a:spcAft>
+              <a:defRPr sz="1000"/>
+            </a:pPr>
+            <a:r>
+              <a:t>Secondary conversion: 97% of primary.</a:t>
             </a:r>
           </a:p>
           <a:p>
